--- a/public/recursos-semana-4/presentacion-semana-4.pptx
+++ b/public/recursos-semana-4/presentacion-semana-4.pptx
@@ -1589,7 +1589,7 @@
       </p:grpSpPr>
       <p:pic>
         <p:nvPicPr>
-          <p:cNvPr id="2" name="Image 0" descr="/home/claude/work/r47/logo-cimiento-small.png">    </p:cNvPr>
+          <p:cNvPr id="2" name="Image 0" descr="/home/claude/work/b/cimiento-bloque1/tools/materiales/out/cache/logo-cimiento-small.png">    </p:cNvPr>
           <p:cNvPicPr>
             <a:picLocks noChangeAspect="1"/>
           </p:cNvPicPr>
@@ -1613,7 +1613,7 @@
       </p:pic>
       <p:pic>
         <p:nvPicPr>
-          <p:cNvPr id="3" name="Image 1" descr="/home/claude/work/r47/logo-ieoh-badge.png">    </p:cNvPr>
+          <p:cNvPr id="3" name="Image 1" descr="/home/claude/work/b/cimiento-bloque1/tools/materiales/out/cache/logo-ieoh-badge.png">    </p:cNvPr>
           <p:cNvPicPr>
             <a:picLocks noChangeAspect="1"/>
           </p:cNvPicPr>
@@ -1715,7 +1715,7 @@
       </p:sp>
       <p:pic>
         <p:nvPicPr>
-          <p:cNvPr id="6" name="Image 2" descr="/home/claude/work/r47/ill_bird.png">    </p:cNvPr>
+          <p:cNvPr id="6" name="Image 2" descr="/home/claude/work/b/cimiento-bloque1/tools/materiales/out/cache/ill_bird.png">    </p:cNvPr>
           <p:cNvPicPr>
             <a:picLocks noChangeAspect="1"/>
           </p:cNvPicPr>
@@ -1739,7 +1739,7 @@
       </p:pic>
       <p:pic>
         <p:nvPicPr>
-          <p:cNvPr id="7" name="Image 3" descr="/home/claude/work/r47/nina_wave.png">    </p:cNvPr>
+          <p:cNvPr id="7" name="Image 3" descr="/home/claude/work/b/cimiento-bloque1/tools/materiales/out/cache/nino_wave_900.png">    </p:cNvPr>
           <p:cNvPicPr>
             <a:picLocks noChangeAspect="1"/>
           </p:cNvPicPr>
@@ -1753,8 +1753,8 @@
         </p:blipFill>
         <p:spPr>
           <a:xfrm>
-            <a:off x="6035040" y="3749040"/>
-            <a:ext cx="1609344" cy="2743200"/>
+            <a:off x="6035040" y="3840480"/>
+            <a:ext cx="1764792" cy="2651760"/>
           </a:xfrm>
           <a:prstGeom prst="rect">
             <a:avLst/>
@@ -1821,7 +1821,7 @@
         </p:nvSpPr>
         <p:spPr>
           <a:xfrm>
-            <a:off x="548640" y="2103120"/>
+            <a:off x="548640" y="1828800"/>
             <a:ext cx="11064240" cy="1645920"/>
           </a:xfrm>
           <a:prstGeom prst="rect">
@@ -1846,32 +1846,15 @@
                 <a:ea typeface="Cambria" pitchFamily="34" charset="-122"/>
                 <a:cs typeface="Cambria" pitchFamily="34" charset="-120"/>
               </a:rPr>
-              <a:t>¿Alguna vez sentiste que valías menos</a:t>
+              <a:t>¿Alguna vez sentiste que valías menos porque algo no te salió bien?</a:t>
             </a:r>
             <a:endParaRPr lang="en-US" sz="4200" dirty="0"/>
           </a:p>
-          <a:p>
-            <a:pPr algn="ctr" indent="0" marL="0">
-              <a:buNone/>
-            </a:pPr>
-            <a:r>
-              <a:rPr lang="en-US" sz="4200" b="1" dirty="0">
-                <a:solidFill>
-                  <a:srgbClr val="0E2338"/>
-                </a:solidFill>
-                <a:latin typeface="Cambria" pitchFamily="34" charset="0"/>
-                <a:ea typeface="Cambria" pitchFamily="34" charset="-122"/>
-                <a:cs typeface="Cambria" pitchFamily="34" charset="-120"/>
-              </a:rPr>
-              <a:t>porque algo no te salió bien?</a:t>
-            </a:r>
-            <a:endParaRPr lang="en-US" sz="4200" dirty="0"/>
-          </a:p>
         </p:txBody>
       </p:sp>
       <p:pic>
         <p:nvPicPr>
-          <p:cNvPr id="4" name="Image 0" descr="/home/claude/work/r47/ill_treasure.png">    </p:cNvPr>
+          <p:cNvPr id="4" name="Image 0" descr="/home/claude/work/b/cimiento-bloque1/tools/materiales/out/cache/ill_treasure.png">    </p:cNvPr>
           <p:cNvPicPr>
             <a:picLocks noChangeAspect="1"/>
           </p:cNvPicPr>
@@ -2101,7 +2084,7 @@
       </p:sp>
       <p:pic>
         <p:nvPicPr>
-          <p:cNvPr id="4" name="Image 0" descr="/home/claude/work/r47/ill_sun.png">    </p:cNvPr>
+          <p:cNvPr id="4" name="Image 0" descr="/home/claude/work/b/cimiento-bloque1/tools/materiales/out/cache/ill_sun.png">    </p:cNvPr>
           <p:cNvPicPr>
             <a:picLocks noChangeAspect="1"/>
           </p:cNvPicPr>
@@ -2188,7 +2171,7 @@
       </p:sp>
       <p:pic>
         <p:nvPicPr>
-          <p:cNvPr id="7" name="Image 1" descr="/home/claude/work/r47/ill_mirror.png">    </p:cNvPr>
+          <p:cNvPr id="7" name="Image 1" descr="/home/claude/work/b/cimiento-bloque1/tools/materiales/out/cache/ill_mirror.png">    </p:cNvPr>
           <p:cNvPicPr>
             <a:picLocks noChangeAspect="1"/>
           </p:cNvPicPr>
@@ -2275,7 +2258,7 @@
       </p:sp>
       <p:pic>
         <p:nvPicPr>
-          <p:cNvPr id="10" name="Image 2" descr="/home/claude/work/r47/ill_heart_hands.png">    </p:cNvPr>
+          <p:cNvPr id="10" name="Image 2" descr="/home/claude/work/b/cimiento-bloque1/tools/materiales/out/cache/ill_heart_hands.png">    </p:cNvPr>
           <p:cNvPicPr>
             <a:picLocks noChangeAspect="1"/>
           </p:cNvPicPr>
@@ -2369,7 +2352,7 @@
       </p:grpSpPr>
       <p:pic>
         <p:nvPicPr>
-          <p:cNvPr id="2" name="Image 0" descr="/home/claude/work/r47/nino_wave.png">    </p:cNvPr>
+          <p:cNvPr id="2" name="Image 0" descr="/home/claude/work/b/cimiento-bloque1/tools/materiales/out/cache/nina_wave_900.png">    </p:cNvPr>
           <p:cNvPicPr>
             <a:picLocks noChangeAspect="1"/>
           </p:cNvPicPr>
@@ -2383,8 +2366,8 @@
         </p:blipFill>
         <p:spPr>
           <a:xfrm>
-            <a:off x="5257800" y="822960"/>
-            <a:ext cx="1536192" cy="2606040"/>
+            <a:off x="5303520" y="822960"/>
+            <a:ext cx="1892808" cy="2834640"/>
           </a:xfrm>
           <a:prstGeom prst="rect">
             <a:avLst/>
@@ -2558,24 +2541,7 @@
                 <a:ea typeface="Cambria" pitchFamily="34" charset="-122"/>
                 <a:cs typeface="Cambria" pitchFamily="34" charset="-120"/>
               </a:rPr>
-              <a:t>Si Dios cuida hasta de los pajarillos pequeños,</a:t>
-            </a:r>
-            <a:endParaRPr lang="en-US" sz="3200" dirty="0"/>
-          </a:p>
-          <a:p>
-            <a:pPr algn="ctr" indent="0" marL="0">
-              <a:buNone/>
-            </a:pPr>
-            <a:r>
-              <a:rPr lang="en-US" sz="3200" b="1" dirty="0">
-                <a:solidFill>
-                  <a:srgbClr val="0E2338"/>
-                </a:solidFill>
-                <a:latin typeface="Cambria" pitchFamily="34" charset="0"/>
-                <a:ea typeface="Cambria" pitchFamily="34" charset="-122"/>
-                <a:cs typeface="Cambria" pitchFamily="34" charset="-120"/>
-              </a:rPr>
-              <a:t>¿cómo crees que te cuida a ti?</a:t>
+              <a:t>Si Dios cuida hasta de los pajarillos pequeños, ¿cómo crees que te cuida a ti?</a:t>
             </a:r>
             <a:endParaRPr lang="en-US" sz="3200" dirty="0"/>
           </a:p>
@@ -2877,32 +2843,15 @@
                 <a:ea typeface="Calibri" pitchFamily="34" charset="-122"/>
                 <a:cs typeface="Calibri" pitchFamily="34" charset="-120"/>
               </a:rPr>
-              <a:t>Haz tu manualidad "Mi valor"</a:t>
+              <a:t>Haz tu manualidad «Mi valor» y comparte algo que aprendiste sobre tu valor.</a:t>
             </a:r>
             <a:endParaRPr lang="en-US" sz="2600" dirty="0"/>
           </a:p>
-          <a:p>
-            <a:pPr algn="ctr" indent="0" marL="0">
-              <a:buNone/>
-            </a:pPr>
-            <a:r>
-              <a:rPr lang="en-US" sz="2600" dirty="0">
-                <a:solidFill>
-                  <a:srgbClr val="0E2338"/>
-                </a:solidFill>
-                <a:latin typeface="Calibri" pitchFamily="34" charset="0"/>
-                <a:ea typeface="Calibri" pitchFamily="34" charset="-122"/>
-                <a:cs typeface="Calibri" pitchFamily="34" charset="-120"/>
-              </a:rPr>
-              <a:t>y comparte algo que aprendiste sobre tu valor.</a:t>
-            </a:r>
-            <a:endParaRPr lang="en-US" sz="2600" dirty="0"/>
-          </a:p>
         </p:txBody>
       </p:sp>
       <p:pic>
         <p:nvPicPr>
-          <p:cNvPr id="5" name="Image 0" descr="/home/claude/work/r47/ill_treasure.png">    </p:cNvPr>
+          <p:cNvPr id="5" name="Image 0" descr="/home/claude/work/b/cimiento-bloque1/tools/materiales/out/cache/ill_treasure.png">    </p:cNvPr>
           <p:cNvPicPr>
             <a:picLocks noChangeAspect="1"/>
           </p:cNvPicPr>
@@ -2926,7 +2875,7 @@
       </p:pic>
       <p:pic>
         <p:nvPicPr>
-          <p:cNvPr id="6" name="Image 1" descr="/home/claude/work/r47/ill_bird.png">    </p:cNvPr>
+          <p:cNvPr id="6" name="Image 1" descr="/home/claude/work/b/cimiento-bloque1/tools/materiales/out/cache/ill_bird.png">    </p:cNvPr>
           <p:cNvPicPr>
             <a:picLocks noChangeAspect="1"/>
           </p:cNvPicPr>
@@ -2982,7 +2931,7 @@
       </p:grpSpPr>
       <p:pic>
         <p:nvPicPr>
-          <p:cNvPr id="2" name="Image 0" descr="/home/claude/work/r47/logo-cimiento-small.png">    </p:cNvPr>
+          <p:cNvPr id="2" name="Image 0" descr="/home/claude/work/b/cimiento-bloque1/tools/materiales/out/cache/logo-cimiento-small.png">    </p:cNvPr>
           <p:cNvPicPr>
             <a:picLocks noChangeAspect="1"/>
           </p:cNvPicPr>
@@ -3006,7 +2955,7 @@
       </p:pic>
       <p:pic>
         <p:nvPicPr>
-          <p:cNvPr id="3" name="Image 1" descr="/home/claude/work/r47/logo-ieoh-badge.png">    </p:cNvPr>
+          <p:cNvPr id="3" name="Image 1" descr="/home/claude/work/b/cimiento-bloque1/tools/materiales/out/cache/logo-ieoh-badge.png">    </p:cNvPr>
           <p:cNvPicPr>
             <a:picLocks noChangeAspect="1"/>
           </p:cNvPicPr>
@@ -3061,24 +3010,7 @@
                 <a:ea typeface="Cambria" pitchFamily="34" charset="-122"/>
                 <a:cs typeface="Cambria" pitchFamily="34" charset="-120"/>
               </a:rPr>
-              <a:t>Gracias, Dios,</a:t>
-            </a:r>
-            <a:endParaRPr lang="en-US" sz="4200" dirty="0"/>
-          </a:p>
-          <a:p>
-            <a:pPr algn="ctr" indent="0" marL="0">
-              <a:buNone/>
-            </a:pPr>
-            <a:r>
-              <a:rPr lang="en-US" sz="4200" b="1" dirty="0">
-                <a:solidFill>
-                  <a:srgbClr val="FDFCFA"/>
-                </a:solidFill>
-                <a:latin typeface="Cambria" pitchFamily="34" charset="0"/>
-                <a:ea typeface="Cambria" pitchFamily="34" charset="-122"/>
-                <a:cs typeface="Cambria" pitchFamily="34" charset="-120"/>
-              </a:rPr>
-              <a:t>porque mi valor viene de ti.</a:t>
+              <a:t>Gracias, Dios, porque mi valor viene de ti.</a:t>
             </a:r>
             <a:endParaRPr lang="en-US" sz="4200" dirty="0"/>
           </a:p>
